--- a/courses/03-introduction-to-machine-learning/16-linear-algebra-in-ML/Topics5_6_Lesson.pptx
+++ b/courses/03-introduction-to-machine-learning/16-linear-algebra-in-ML/Topics5_6_Lesson.pptx
@@ -3188,7 +3188,7 @@
                 <a:ea typeface="Calibri" pitchFamily="34" charset="-122"/>
                 <a:cs typeface="Calibri" pitchFamily="34" charset="-120"/>
               </a:rPr>
-              <a:t>Topics 5 &amp; 6  |  90-minute lesson</a:t>
+              <a:t>Topics 5 &amp; 6  </a:t>
             </a:r>
             <a:endParaRPr lang="en-US" sz="2200" dirty="0"/>
           </a:p>
